--- a/slides/mapreduce/mapreduce_by_Mahmoud_Parsian/07_filters_in_mapreduce.pptx
+++ b/slides/mapreduce/mapreduce_by_Mahmoud_Parsian/07_filters_in_mapreduce.pptx
@@ -10766,7 +10766,7 @@
                   <a:srgbClr val="0000FF"/>
                 </a:solidFill>
               </a:rPr>
-              <a:t>in</a:t>
+              <a:t>in </a:t>
             </a:r>
             <a:br>
               <a:rPr lang="en-US" sz="7200" b="1" dirty="0">
@@ -15898,7 +15898,7 @@
                 <a:latin typeface="Consolas" panose="020B0609020204030204" pitchFamily="49" charset="0"/>
                 <a:cs typeface="Consolas" panose="020B0609020204030204" pitchFamily="49" charset="0"/>
               </a:rPr>
-              <a:t>(red, 2),</a:t>
+              <a:t>(red, 2)</a:t>
             </a:r>
           </a:p>
           <a:p>
@@ -16352,7 +16352,7 @@
                 <a:latin typeface="Courier New" pitchFamily="49" charset="0"/>
                 <a:cs typeface="Courier New" pitchFamily="49" charset="0"/>
               </a:rPr>
-              <a:t>(store, 1) (was, 1) (closed, 1) (the, 1) (store, 1) (opens, 1) (in, 1) (the, 1) (morning, 1) (the, 1) (store, 1&gt; </a:t>
+              <a:t>(store, 1) (was, 1) (closed, 1) (the, 1) (store, 1) (opens, 1) (in, 1) (the, 1) (morning, 1) (the, 1) (store, 1) </a:t>
             </a:r>
           </a:p>
           <a:p>
@@ -16697,7 +16697,7 @@
                   <a:srgbClr val="663300"/>
                 </a:solidFill>
               </a:rPr>
-              <a:t>, 1) (opens, 1) (at, 1)  (9am, 1)</a:t>
+              <a:t>, 1) (opens, 1) (at, 1) (9am, 1)</a:t>
             </a:r>
           </a:p>
           <a:p>
@@ -16737,7 +16737,7 @@
                 </a:solidFill>
                 <a:latin typeface="Courier" pitchFamily="2" charset="0"/>
               </a:rPr>
-              <a:t>The</a:t>
+              <a:t>the</a:t>
             </a:r>
             <a:r>
               <a:rPr lang="en-US" sz="2400" dirty="0">
@@ -16778,7 +16778,7 @@
                 </a:solidFill>
                 <a:latin typeface="Courier" pitchFamily="2" charset="0"/>
               </a:rPr>
-              <a:t>(store, [1, 1, 1])</a:t>
+              <a:t>(store, [1, 1, 1, 1])</a:t>
             </a:r>
           </a:p>
           <a:p>
@@ -16938,7 +16938,7 @@
                   <a:srgbClr val="663300"/>
                 </a:solidFill>
               </a:rPr>
-              <a:t> Input to reducer: (store, [1, 1, 1])</a:t>
+              <a:t> Input to reducer: (store, [1, 1, 1, 1])</a:t>
             </a:r>
           </a:p>
           <a:p>
@@ -16949,7 +16949,7 @@
                   <a:srgbClr val="663300"/>
                 </a:solidFill>
               </a:rPr>
-              <a:t>Output: (store, 3)</a:t>
+              <a:t>Output: (store, 4)</a:t>
             </a:r>
           </a:p>
           <a:p>
@@ -17104,7 +17104,7 @@
                   <a:srgbClr val="000066"/>
                 </a:solidFill>
               </a:rPr>
-              <a:t>(identify your input files,…)</a:t>
+              <a:t>(identify your input files, …)</a:t>
             </a:r>
           </a:p>
           <a:p>
@@ -18495,14 +18495,14 @@
           <a:p>
             <a:r>
               <a:rPr lang="en-US" sz="3200" dirty="0"/>
-              <a:t>MapReduce Job:  map() function</a:t>
+              <a:t>MapReduce Job: map() function.</a:t>
             </a:r>
             <a:br>
               <a:rPr lang="en-US" sz="3200" dirty="0"/>
             </a:br>
             <a:r>
               <a:rPr lang="en-US" sz="3200" dirty="0"/>
-              <a:t>Ignore words which begins with “E”</a:t>
+              <a:t> Ignore words which begin with “E”</a:t>
             </a:r>
           </a:p>
         </p:txBody>
@@ -18926,14 +18926,14 @@
           <a:p>
             <a:r>
               <a:rPr lang="en-US" sz="2000" dirty="0"/>
-              <a:t>MapReduce Job:  map() function</a:t>
+              <a:t>MapReduce Job: map() function.</a:t>
             </a:r>
             <a:br>
               <a:rPr lang="en-US" sz="2000" dirty="0"/>
             </a:br>
             <a:r>
               <a:rPr lang="en-US" sz="2000" dirty="0"/>
-              <a:t>Ignore words with length of less than 3 Chars.</a:t>
+              <a:t> Ignore words with length of less than 3 Chars.</a:t>
             </a:r>
           </a:p>
         </p:txBody>
@@ -19337,14 +19337,14 @@
           <a:p>
             <a:r>
               <a:rPr lang="en-US" sz="2000" dirty="0"/>
-              <a:t>MapReduce Job:  map() function</a:t>
+              <a:t>MapReduce Job: map() function.</a:t>
             </a:r>
             <a:br>
               <a:rPr lang="en-US" sz="2000" dirty="0"/>
             </a:br>
             <a:r>
               <a:rPr lang="en-US" sz="2000" dirty="0"/>
-              <a:t>Ignore records with length of less than 80 chars</a:t>
+              <a:t> Ignore records with length of less than 80 chars.</a:t>
             </a:r>
           </a:p>
         </p:txBody>
@@ -21126,14 +21126,14 @@
           <a:p>
             <a:r>
               <a:rPr lang="en-US" sz="3200" dirty="0"/>
-              <a:t>MapReduce Job:  reduce() function</a:t>
+              <a:t>MapReduce Job: reduce() function.</a:t>
             </a:r>
             <a:br>
               <a:rPr lang="en-US" sz="3200" dirty="0"/>
             </a:br>
             <a:r>
               <a:rPr lang="en-US" sz="3200" dirty="0"/>
-              <a:t>ignore words which begin with “E”</a:t>
+              <a:t> Ignore words which begin with “E”</a:t>
             </a:r>
           </a:p>
         </p:txBody>
@@ -21271,7 +21271,7 @@
                 <a:latin typeface="Consolas" panose="020B0609020204030204" pitchFamily="49" charset="0"/>
                 <a:cs typeface="Consolas" panose="020B0609020204030204" pitchFamily="49" charset="0"/>
               </a:rPr>
-              <a:t>key.beginswith</a:t>
+              <a:t>key.startswith</a:t>
             </a:r>
             <a:r>
               <a:rPr lang="en-US" sz="2000" b="1" dirty="0">
@@ -21533,14 +21533,14 @@
           <a:p>
             <a:r>
               <a:rPr lang="en-US" sz="2000" dirty="0"/>
-              <a:t>MapReduce Job:  reduce() function + what if we want to ignore</a:t>
+              <a:t>MapReduce Job: reduce() function + what if we want to ignore </a:t>
             </a:r>
             <a:br>
               <a:rPr lang="en-US" sz="2000" dirty="0"/>
             </a:br>
             <a:r>
               <a:rPr lang="en-US" sz="2000" dirty="0"/>
-              <a:t>words with frequencies of less than 5 </a:t>
+              <a:t>words with frequencies of less than 5.</a:t>
             </a:r>
           </a:p>
         </p:txBody>
@@ -21923,14 +21923,14 @@
           <a:p>
             <a:r>
               <a:rPr lang="en-US" sz="2000" dirty="0"/>
-              <a:t>MapReduce Job:  reduce() function + what if we want to ignore</a:t>
+              <a:t>MapReduce Job: reduce() function + what if we want to ignore </a:t>
             </a:r>
             <a:br>
               <a:rPr lang="en-US" sz="2000" dirty="0"/>
             </a:br>
             <a:r>
               <a:rPr lang="en-US" sz="2000" dirty="0"/>
-              <a:t>words with frequencies of less than 5 </a:t>
+              <a:t>words with frequencies of less than 5.</a:t>
             </a:r>
           </a:p>
         </p:txBody>
@@ -22415,21 +22415,21 @@
           <a:p>
             <a:r>
               <a:rPr lang="en-US" sz="1400" dirty="0"/>
-              <a:t>MapReduce Job:  reduce() function + what if we want to ignore</a:t>
+              <a:t>MapReduce Job: reduce() function + what if we want to ignore </a:t>
             </a:r>
             <a:br>
               <a:rPr lang="en-US" sz="1400" dirty="0"/>
             </a:br>
             <a:r>
               <a:rPr lang="en-US" sz="1400" dirty="0"/>
-              <a:t>words with frequencies of less than 5 </a:t>
+              <a:t>words with frequencies of less than 5, and </a:t>
             </a:r>
             <a:br>
               <a:rPr lang="en-US" sz="1400" dirty="0"/>
             </a:br>
             <a:r>
               <a:rPr lang="en-US" sz="1400" dirty="0"/>
-              <a:t>Ignore words with length of less than 3 Chars.</a:t>
+              <a:t>ignore words with length of less than 3 Chars.</a:t>
             </a:r>
           </a:p>
         </p:txBody>
@@ -23362,14 +23362,14 @@
           <a:p>
             <a:r>
               <a:rPr lang="en-US" sz="2000" dirty="0"/>
-              <a:t>MapReduce Job:  reduce() function</a:t>
+              <a:t>MapReduce Job: reduce() function.</a:t>
             </a:r>
             <a:br>
               <a:rPr lang="en-US" sz="2000" dirty="0"/>
             </a:br>
             <a:r>
               <a:rPr lang="en-US" sz="2000" dirty="0"/>
-              <a:t>Ignore records with length of less than 80 chars</a:t>
+              <a:t> Ignore records with length of less than 80 chars.</a:t>
             </a:r>
           </a:p>
         </p:txBody>
